--- a/documents/JS.pptx
+++ b/documents/JS.pptx
@@ -218,7 +218,7 @@
           <a:p>
             <a:fld id="{1F699AE0-7EE4-44D4-A17A-7D48813CC677}" type="datetimeFigureOut">
               <a:rPr lang="th-TH" smtClean="0"/>
-              <a:t>09/09/68</a:t>
+              <a:t>26/02/69</a:t>
             </a:fld>
             <a:endParaRPr lang="th-TH"/>
           </a:p>
@@ -779,7 +779,7 @@
           <a:p>
             <a:fld id="{0D70A82F-64F0-4159-8406-70A3A656AF0D}" type="datetimeFigureOut">
               <a:rPr lang="th-TH" smtClean="0"/>
-              <a:t>09/09/68</a:t>
+              <a:t>26/02/69</a:t>
             </a:fld>
             <a:endParaRPr lang="th-TH"/>
           </a:p>
@@ -979,7 +979,7 @@
           <a:p>
             <a:fld id="{0D70A82F-64F0-4159-8406-70A3A656AF0D}" type="datetimeFigureOut">
               <a:rPr lang="th-TH" smtClean="0"/>
-              <a:t>09/09/68</a:t>
+              <a:t>26/02/69</a:t>
             </a:fld>
             <a:endParaRPr lang="th-TH"/>
           </a:p>
@@ -1189,7 +1189,7 @@
           <a:p>
             <a:fld id="{0D70A82F-64F0-4159-8406-70A3A656AF0D}" type="datetimeFigureOut">
               <a:rPr lang="th-TH" smtClean="0"/>
-              <a:t>09/09/68</a:t>
+              <a:t>26/02/69</a:t>
             </a:fld>
             <a:endParaRPr lang="th-TH"/>
           </a:p>
@@ -1389,7 +1389,7 @@
           <a:p>
             <a:fld id="{0D70A82F-64F0-4159-8406-70A3A656AF0D}" type="datetimeFigureOut">
               <a:rPr lang="th-TH" smtClean="0"/>
-              <a:t>09/09/68</a:t>
+              <a:t>26/02/69</a:t>
             </a:fld>
             <a:endParaRPr lang="th-TH"/>
           </a:p>
@@ -1665,7 +1665,7 @@
           <a:p>
             <a:fld id="{0D70A82F-64F0-4159-8406-70A3A656AF0D}" type="datetimeFigureOut">
               <a:rPr lang="th-TH" smtClean="0"/>
-              <a:t>09/09/68</a:t>
+              <a:t>26/02/69</a:t>
             </a:fld>
             <a:endParaRPr lang="th-TH"/>
           </a:p>
@@ -1933,7 +1933,7 @@
           <a:p>
             <a:fld id="{0D70A82F-64F0-4159-8406-70A3A656AF0D}" type="datetimeFigureOut">
               <a:rPr lang="th-TH" smtClean="0"/>
-              <a:t>09/09/68</a:t>
+              <a:t>26/02/69</a:t>
             </a:fld>
             <a:endParaRPr lang="th-TH"/>
           </a:p>
@@ -2348,7 +2348,7 @@
           <a:p>
             <a:fld id="{0D70A82F-64F0-4159-8406-70A3A656AF0D}" type="datetimeFigureOut">
               <a:rPr lang="th-TH" smtClean="0"/>
-              <a:t>09/09/68</a:t>
+              <a:t>26/02/69</a:t>
             </a:fld>
             <a:endParaRPr lang="th-TH"/>
           </a:p>
@@ -2490,7 +2490,7 @@
           <a:p>
             <a:fld id="{0D70A82F-64F0-4159-8406-70A3A656AF0D}" type="datetimeFigureOut">
               <a:rPr lang="th-TH" smtClean="0"/>
-              <a:t>09/09/68</a:t>
+              <a:t>26/02/69</a:t>
             </a:fld>
             <a:endParaRPr lang="th-TH"/>
           </a:p>
@@ -2603,7 +2603,7 @@
           <a:p>
             <a:fld id="{0D70A82F-64F0-4159-8406-70A3A656AF0D}" type="datetimeFigureOut">
               <a:rPr lang="th-TH" smtClean="0"/>
-              <a:t>09/09/68</a:t>
+              <a:t>26/02/69</a:t>
             </a:fld>
             <a:endParaRPr lang="th-TH"/>
           </a:p>
@@ -2963,7 +2963,7 @@
           <a:p>
             <a:fld id="{0D70A82F-64F0-4159-8406-70A3A656AF0D}" type="datetimeFigureOut">
               <a:rPr lang="th-TH" smtClean="0"/>
-              <a:t>09/09/68</a:t>
+              <a:t>26/02/69</a:t>
             </a:fld>
             <a:endParaRPr lang="th-TH"/>
           </a:p>
@@ -3252,7 +3252,7 @@
           <a:p>
             <a:fld id="{0D70A82F-64F0-4159-8406-70A3A656AF0D}" type="datetimeFigureOut">
               <a:rPr lang="th-TH" smtClean="0"/>
-              <a:t>09/09/68</a:t>
+              <a:t>26/02/69</a:t>
             </a:fld>
             <a:endParaRPr lang="th-TH"/>
           </a:p>
@@ -3495,7 +3495,7 @@
           <a:p>
             <a:fld id="{0D70A82F-64F0-4159-8406-70A3A656AF0D}" type="datetimeFigureOut">
               <a:rPr lang="th-TH" smtClean="0"/>
-              <a:t>09/09/68</a:t>
+              <a:t>26/02/69</a:t>
             </a:fld>
             <a:endParaRPr lang="th-TH"/>
           </a:p>
@@ -18167,6 +18167,64 @@
               </a:solidFill>
               <a:latin typeface="Courier New" panose="02070309020205020404" pitchFamily="49" charset="0"/>
               <a:cs typeface="TH Sarabun New" panose="020B0500040200020003" pitchFamily="34" charset="-34"/>
+            </a:endParaRPr>
+          </a:p>
+        </p:txBody>
+      </p:sp>
+      <p:sp>
+        <p:nvSpPr>
+          <p:cNvPr id="2" name="TextBox 1">
+            <a:extLst>
+              <a:ext uri="{FF2B5EF4-FFF2-40B4-BE49-F238E27FC236}">
+                <a16:creationId xmlns:a16="http://schemas.microsoft.com/office/drawing/2014/main" id="{3E4DF17E-A2D3-B661-6860-070381C1972F}"/>
+              </a:ext>
+            </a:extLst>
+          </p:cNvPr>
+          <p:cNvSpPr txBox="1"/>
+          <p:nvPr/>
+        </p:nvSpPr>
+        <p:spPr>
+          <a:xfrm>
+            <a:off x="1018443" y="4622454"/>
+            <a:ext cx="3448380" cy="923330"/>
+          </a:xfrm>
+          <a:prstGeom prst="rect">
+            <a:avLst/>
+          </a:prstGeom>
+          <a:noFill/>
+        </p:spPr>
+        <p:txBody>
+          <a:bodyPr wrap="none" rtlCol="0">
+            <a:spAutoFit/>
+          </a:bodyPr>
+          <a:lstStyle/>
+          <a:p>
+            <a:r>
+              <a:rPr lang="th-TH" dirty="0">
+                <a:solidFill>
+                  <a:srgbClr val="FF0000"/>
+                </a:solidFill>
+                <a:latin typeface="Kanit" pitchFamily="2" charset="-34"/>
+                <a:cs typeface="Kanit" pitchFamily="2" charset="-34"/>
+              </a:rPr>
+              <a:t>ลองเปลี่ยนเป็น </a:t>
+            </a:r>
+            <a:r>
+              <a:rPr lang="en-US" sz="5400" dirty="0">
+                <a:solidFill>
+                  <a:srgbClr val="00B0F0"/>
+                </a:solidFill>
+                <a:latin typeface="Kanit" pitchFamily="2" charset="-34"/>
+                <a:cs typeface="Kanit" pitchFamily="2" charset="-34"/>
+              </a:rPr>
+              <a:t>var</a:t>
+            </a:r>
+            <a:endParaRPr lang="th-TH" dirty="0">
+              <a:solidFill>
+                <a:srgbClr val="00B0F0"/>
+              </a:solidFill>
+              <a:latin typeface="Kanit" pitchFamily="2" charset="-34"/>
+              <a:cs typeface="Kanit" pitchFamily="2" charset="-34"/>
             </a:endParaRPr>
           </a:p>
         </p:txBody>

--- a/documents/JS.pptx
+++ b/documents/JS.pptx
@@ -487,6 +487,90 @@
 </file>
 
 <file path=ppt/notesSlides/notesSlide1.xml><?xml version="1.0" encoding="utf-8"?>
+<p:notes xmlns:a="http://schemas.openxmlformats.org/drawingml/2006/main" xmlns:r="http://schemas.openxmlformats.org/officeDocument/2006/relationships" xmlns:p="http://schemas.openxmlformats.org/presentationml/2006/main">
+  <p:cSld>
+    <p:spTree>
+      <p:nvGrpSpPr>
+        <p:cNvPr id="1" name=""/>
+        <p:cNvGrpSpPr/>
+        <p:nvPr/>
+      </p:nvGrpSpPr>
+      <p:grpSpPr>
+        <a:xfrm>
+          <a:off x="0" y="0"/>
+          <a:ext cx="0" cy="0"/>
+          <a:chOff x="0" y="0"/>
+          <a:chExt cx="0" cy="0"/>
+        </a:xfrm>
+      </p:grpSpPr>
+      <p:sp>
+        <p:nvSpPr>
+          <p:cNvPr id="2" name="Slide Image Placeholder 1"/>
+          <p:cNvSpPr>
+            <a:spLocks noGrp="1" noRot="1" noChangeAspect="1"/>
+          </p:cNvSpPr>
+          <p:nvPr>
+            <p:ph type="sldImg"/>
+          </p:nvPr>
+        </p:nvSpPr>
+        <p:spPr/>
+      </p:sp>
+      <p:sp>
+        <p:nvSpPr>
+          <p:cNvPr id="3" name="Notes Placeholder 2"/>
+          <p:cNvSpPr>
+            <a:spLocks noGrp="1"/>
+          </p:cNvSpPr>
+          <p:nvPr>
+            <p:ph type="body" idx="1"/>
+          </p:nvPr>
+        </p:nvSpPr>
+        <p:spPr/>
+        <p:txBody>
+          <a:bodyPr/>
+          <a:lstStyle/>
+          <a:p>
+            <a:endParaRPr lang="th-TH" dirty="0"/>
+          </a:p>
+        </p:txBody>
+      </p:sp>
+      <p:sp>
+        <p:nvSpPr>
+          <p:cNvPr id="4" name="Slide Number Placeholder 3"/>
+          <p:cNvSpPr>
+            <a:spLocks noGrp="1"/>
+          </p:cNvSpPr>
+          <p:nvPr>
+            <p:ph type="sldNum" sz="quarter" idx="5"/>
+          </p:nvPr>
+        </p:nvSpPr>
+        <p:spPr/>
+        <p:txBody>
+          <a:bodyPr/>
+          <a:lstStyle/>
+          <a:p>
+            <a:fld id="{DAE25523-E87F-45A7-ACC4-BF3F72FCC267}" type="slidenum">
+              <a:rPr lang="th-TH" smtClean="0"/>
+              <a:t>14</a:t>
+            </a:fld>
+            <a:endParaRPr lang="th-TH"/>
+          </a:p>
+        </p:txBody>
+      </p:sp>
+    </p:spTree>
+    <p:extLst>
+      <p:ext uri="{BB962C8B-B14F-4D97-AF65-F5344CB8AC3E}">
+        <p14:creationId xmlns:p14="http://schemas.microsoft.com/office/powerpoint/2010/main" val="1140034669"/>
+      </p:ext>
+    </p:extLst>
+  </p:cSld>
+  <p:clrMapOvr>
+    <a:masterClrMapping/>
+  </p:clrMapOvr>
+</p:notes>
+</file>
+
+<file path=ppt/notesSlides/notesSlide2.xml><?xml version="1.0" encoding="utf-8"?>
 <p:notes xmlns:a="http://schemas.openxmlformats.org/drawingml/2006/main" xmlns:r="http://schemas.openxmlformats.org/officeDocument/2006/relationships" xmlns:p="http://schemas.openxmlformats.org/presentationml/2006/main">
   <p:cSld>
     <p:spTree>
@@ -4323,75 +4407,6 @@
           </a:prstGeom>
         </p:spPr>
       </p:pic>
-      <p:sp>
-        <p:nvSpPr>
-          <p:cNvPr id="6" name="TextBox 5">
-            <a:extLst>
-              <a:ext uri="{FF2B5EF4-FFF2-40B4-BE49-F238E27FC236}">
-                <a16:creationId xmlns:a16="http://schemas.microsoft.com/office/drawing/2014/main" id="{3606EF5D-FF48-1366-2E3D-36E55A7A0353}"/>
-              </a:ext>
-            </a:extLst>
-          </p:cNvPr>
-          <p:cNvSpPr txBox="1"/>
-          <p:nvPr/>
-        </p:nvSpPr>
-        <p:spPr>
-          <a:xfrm>
-            <a:off x="6639735" y="496418"/>
-            <a:ext cx="3102765" cy="400110"/>
-          </a:xfrm>
-          <a:prstGeom prst="rect">
-            <a:avLst/>
-          </a:prstGeom>
-          <a:noFill/>
-        </p:spPr>
-        <p:txBody>
-          <a:bodyPr wrap="square">
-            <a:spAutoFit/>
-          </a:bodyPr>
-          <a:lstStyle/>
-          <a:p>
-            <a:pPr algn="ctr"/>
-            <a:r>
-              <a:rPr lang="en-GB" sz="2000" dirty="0">
-                <a:solidFill>
-                  <a:srgbClr val="00B0F0"/>
-                </a:solidFill>
-                <a:latin typeface="Courier New" panose="02070309020205020404" pitchFamily="49" charset="0"/>
-                <a:cs typeface="Courier New" panose="02070309020205020404" pitchFamily="49" charset="0"/>
-              </a:rPr>
-              <a:t>Test</a:t>
-            </a:r>
-            <a:r>
-              <a:rPr lang="en-US" sz="2000" dirty="0">
-                <a:solidFill>
-                  <a:srgbClr val="00B0F0"/>
-                </a:solidFill>
-                <a:latin typeface="Courier New" panose="02070309020205020404" pitchFamily="49" charset="0"/>
-                <a:cs typeface="Courier New" panose="02070309020205020404" pitchFamily="49" charset="0"/>
-              </a:rPr>
-              <a:t>Symbol</a:t>
-            </a:r>
-            <a:r>
-              <a:rPr lang="en-GB" sz="2000" dirty="0">
-                <a:solidFill>
-                  <a:srgbClr val="00B0F0"/>
-                </a:solidFill>
-                <a:latin typeface="Courier New" panose="02070309020205020404" pitchFamily="49" charset="0"/>
-                <a:cs typeface="Courier New" panose="02070309020205020404" pitchFamily="49" charset="0"/>
-              </a:rPr>
-              <a:t>.html</a:t>
-            </a:r>
-            <a:endParaRPr lang="th-TH" sz="2000" dirty="0">
-              <a:solidFill>
-                <a:srgbClr val="00B0F0"/>
-              </a:solidFill>
-              <a:latin typeface="Courier New" panose="02070309020205020404" pitchFamily="49" charset="0"/>
-              <a:cs typeface="TH Sarabun New" panose="020B0500040200020003" pitchFamily="34" charset="-34"/>
-            </a:endParaRPr>
-          </a:p>
-        </p:txBody>
-      </p:sp>
     </p:spTree>
     <p:extLst>
       <p:ext uri="{BB962C8B-B14F-4D97-AF65-F5344CB8AC3E}">
@@ -5029,7 +5044,7 @@
         </p:nvSpPr>
         <p:spPr>
           <a:xfrm>
-            <a:off x="6639735" y="496418"/>
+            <a:off x="7554135" y="398791"/>
             <a:ext cx="3102765" cy="400110"/>
           </a:xfrm>
           <a:prstGeom prst="rect">
@@ -5099,14 +5114,14 @@
           <p:nvPr/>
         </p:nvPicPr>
         <p:blipFill>
-          <a:blip r:embed="rId2"/>
+          <a:blip r:embed="rId3"/>
           <a:stretch>
             <a:fillRect/>
           </a:stretch>
         </p:blipFill>
         <p:spPr>
           <a:xfrm>
-            <a:off x="848042" y="987424"/>
+            <a:off x="553402" y="798901"/>
             <a:ext cx="8011478" cy="5471785"/>
           </a:xfrm>
           <a:prstGeom prst="rect">
@@ -5114,6 +5129,100 @@
           </a:prstGeom>
         </p:spPr>
       </p:pic>
+      <p:sp>
+        <p:nvSpPr>
+          <p:cNvPr id="3" name="TextBox 2">
+            <a:extLst>
+              <a:ext uri="{FF2B5EF4-FFF2-40B4-BE49-F238E27FC236}">
+                <a16:creationId xmlns:a16="http://schemas.microsoft.com/office/drawing/2014/main" id="{4F9DDB90-1216-488D-3F5D-5DF66C57022B}"/>
+              </a:ext>
+            </a:extLst>
+          </p:cNvPr>
+          <p:cNvSpPr txBox="1"/>
+          <p:nvPr/>
+        </p:nvSpPr>
+        <p:spPr>
+          <a:xfrm>
+            <a:off x="1326198" y="6370370"/>
+            <a:ext cx="8879840" cy="400110"/>
+          </a:xfrm>
+          <a:prstGeom prst="rect">
+            <a:avLst/>
+          </a:prstGeom>
+          <a:noFill/>
+        </p:spPr>
+        <p:txBody>
+          <a:bodyPr wrap="square">
+            <a:spAutoFit/>
+          </a:bodyPr>
+          <a:lstStyle/>
+          <a:p>
+            <a:pPr algn="l">
+              <a:buNone/>
+            </a:pPr>
+            <a:r>
+              <a:rPr lang="en-US" sz="2000" b="0" i="0" dirty="0" err="1">
+                <a:solidFill>
+                  <a:srgbClr val="FF0000"/>
+                </a:solidFill>
+                <a:effectLst/>
+                <a:latin typeface="Courier New" panose="02070309020205020404" pitchFamily="49" charset="0"/>
+              </a:rPr>
+              <a:t>array.splice</a:t>
+            </a:r>
+            <a:r>
+              <a:rPr lang="en-US" sz="2000" b="0" i="0" dirty="0">
+                <a:solidFill>
+                  <a:srgbClr val="FF0000"/>
+                </a:solidFill>
+                <a:effectLst/>
+                <a:latin typeface="Courier New" panose="02070309020205020404" pitchFamily="49" charset="0"/>
+              </a:rPr>
+              <a:t>(</a:t>
+            </a:r>
+            <a:r>
+              <a:rPr lang="en-US" sz="2000" b="0" i="0" dirty="0" err="1">
+                <a:solidFill>
+                  <a:srgbClr val="FF0000"/>
+                </a:solidFill>
+                <a:effectLst/>
+                <a:latin typeface="Courier New" panose="02070309020205020404" pitchFamily="49" charset="0"/>
+              </a:rPr>
+              <a:t>startIndex</a:t>
+            </a:r>
+            <a:r>
+              <a:rPr lang="en-US" sz="2000" b="0" i="0" dirty="0">
+                <a:solidFill>
+                  <a:srgbClr val="FF0000"/>
+                </a:solidFill>
+                <a:effectLst/>
+                <a:latin typeface="Courier New" panose="02070309020205020404" pitchFamily="49" charset="0"/>
+              </a:rPr>
+              <a:t>, </a:t>
+            </a:r>
+            <a:r>
+              <a:rPr lang="en-US" sz="2000" b="0" i="0" dirty="0" err="1">
+                <a:solidFill>
+                  <a:srgbClr val="FF0000"/>
+                </a:solidFill>
+                <a:effectLst/>
+                <a:latin typeface="Courier New" panose="02070309020205020404" pitchFamily="49" charset="0"/>
+              </a:rPr>
+              <a:t>deleteCount</a:t>
+            </a:r>
+            <a:r>
+              <a:rPr lang="en-US" sz="2000" b="0" i="0" dirty="0">
+                <a:solidFill>
+                  <a:srgbClr val="FF0000"/>
+                </a:solidFill>
+                <a:effectLst/>
+                <a:latin typeface="Courier New" panose="02070309020205020404" pitchFamily="49" charset="0"/>
+              </a:rPr>
+              <a:t>, item1, item2, ...);</a:t>
+            </a:r>
+          </a:p>
+        </p:txBody>
+      </p:sp>
     </p:spTree>
     <p:extLst>
       <p:ext uri="{BB962C8B-B14F-4D97-AF65-F5344CB8AC3E}">
@@ -10362,6 +10471,41 @@
           </a:prstGeom>
         </p:spPr>
       </p:pic>
+      <p:sp>
+        <p:nvSpPr>
+          <p:cNvPr id="11" name="TextBox 10">
+            <a:extLst>
+              <a:ext uri="{FF2B5EF4-FFF2-40B4-BE49-F238E27FC236}">
+                <a16:creationId xmlns:a16="http://schemas.microsoft.com/office/drawing/2014/main" id="{C03A1AA3-DD7A-B1EC-8FF3-548929C63DBD}"/>
+              </a:ext>
+            </a:extLst>
+          </p:cNvPr>
+          <p:cNvSpPr txBox="1"/>
+          <p:nvPr/>
+        </p:nvSpPr>
+        <p:spPr>
+          <a:xfrm>
+            <a:off x="4267200" y="298955"/>
+            <a:ext cx="6096000" cy="523220"/>
+          </a:xfrm>
+          <a:prstGeom prst="rect">
+            <a:avLst/>
+          </a:prstGeom>
+          <a:noFill/>
+        </p:spPr>
+        <p:txBody>
+          <a:bodyPr wrap="square">
+            <a:spAutoFit/>
+          </a:bodyPr>
+          <a:lstStyle/>
+          <a:p>
+            <a:r>
+              <a:rPr lang="th-TH" dirty="0"/>
+              <a:t>TestConsole.html</a:t>
+            </a:r>
+          </a:p>
+        </p:txBody>
+      </p:sp>
     </p:spTree>
     <p:extLst>
       <p:ext uri="{BB962C8B-B14F-4D97-AF65-F5344CB8AC3E}">
